--- a/Data Extraction/2-Extracting Data with SQL.pptx
+++ b/Data Extraction/2-Extracting Data with SQL.pptx
@@ -153,6 +153,9 @@
         </p14:section>
       </p14:sectionLst>
     </p:ext>
+    <p:ext uri="{EFAFB233-063F-42B5-8137-9DF3F51BA10A}">
+      <p15:sldGuideLst xmlns:p15="http://schemas.microsoft.com/office/powerpoint/2012/main"/>
+    </p:ext>
   </p:extLst>
 </p:presentation>
 </file>
@@ -239,7 +242,7 @@
           <a:p>
             <a:fld id="{FC4CBC0C-18A9-4E8F-9B26-20580006AC75}" type="datetimeFigureOut">
               <a:rPr lang="en-IN" smtClean="0"/>
-              <a:t>03-Oct-2024 Thu</a:t>
+              <a:t>04-Oct-2024 Fri</a:t>
             </a:fld>
             <a:endParaRPr lang="en-IN"/>
           </a:p>
@@ -1789,9 +1792,9 @@
           <a:bodyPr/>
           <a:lstStyle/>
           <a:p>
-            <a:fld id="{C128FA71-3A18-48C0-980F-4B68F7F63042}" type="datetime1">
+            <a:fld id="{3110F4B9-1547-47A2-8E21-C386230CD815}" type="datetime1">
               <a:rPr lang="en-US" smtClean="0"/>
-              <a:t>10/3/2024</a:t>
+              <a:t>10/4/2024</a:t>
             </a:fld>
             <a:endParaRPr lang="en-US"/>
           </a:p>
@@ -1997,9 +2000,9 @@
           <a:bodyPr/>
           <a:lstStyle/>
           <a:p>
-            <a:fld id="{7104EDB3-C0E8-45F8-9E1D-1B6C8D1880C0}" type="datetime1">
+            <a:fld id="{B75BA840-53E5-44F7-8B37-768A4C51A998}" type="datetime1">
               <a:rPr lang="en-US" smtClean="0"/>
-              <a:t>10/3/2024</a:t>
+              <a:t>10/4/2024</a:t>
             </a:fld>
             <a:endParaRPr lang="en-US"/>
           </a:p>
@@ -2207,9 +2210,9 @@
           <a:bodyPr/>
           <a:lstStyle/>
           <a:p>
-            <a:fld id="{9CF0EC4B-54ED-4041-B552-9BA760FA3DBA}" type="datetime1">
+            <a:fld id="{F271E168-EC52-40DE-B439-CA76386ADA60}" type="datetime1">
               <a:rPr lang="en-US" smtClean="0"/>
-              <a:t>10/3/2024</a:t>
+              <a:t>10/4/2024</a:t>
             </a:fld>
             <a:endParaRPr lang="en-US"/>
           </a:p>
@@ -2405,9 +2408,9 @@
           <a:bodyPr/>
           <a:lstStyle/>
           <a:p>
-            <a:fld id="{51C1210E-201E-4473-82AC-2466F5386C38}" type="datetime1">
+            <a:fld id="{F8DE8833-0216-48B2-8EC6-64678616DA05}" type="datetime1">
               <a:rPr lang="en-US" smtClean="0"/>
-              <a:t>10/3/2024</a:t>
+              <a:t>10/4/2024</a:t>
             </a:fld>
             <a:endParaRPr lang="en-US"/>
           </a:p>
@@ -2683,9 +2686,9 @@
           <a:bodyPr/>
           <a:lstStyle/>
           <a:p>
-            <a:fld id="{B01EA198-6CAB-4B8F-B93F-1F9C8C4B6CE7}" type="datetime1">
+            <a:fld id="{B0ECA2E9-640F-495E-87AF-C4C518ACCFCC}" type="datetime1">
               <a:rPr lang="en-US" smtClean="0"/>
-              <a:t>10/3/2024</a:t>
+              <a:t>10/4/2024</a:t>
             </a:fld>
             <a:endParaRPr lang="en-US"/>
           </a:p>
@@ -2955,9 +2958,9 @@
           <a:bodyPr/>
           <a:lstStyle/>
           <a:p>
-            <a:fld id="{CA06041F-4525-44D5-AA4F-332294BF1F56}" type="datetime1">
+            <a:fld id="{2B7846AE-2AA0-4213-80F4-5A2676420744}" type="datetime1">
               <a:rPr lang="en-US" smtClean="0"/>
-              <a:t>10/3/2024</a:t>
+              <a:t>10/4/2024</a:t>
             </a:fld>
             <a:endParaRPr lang="en-US"/>
           </a:p>
@@ -3379,9 +3382,9 @@
           <a:bodyPr/>
           <a:lstStyle/>
           <a:p>
-            <a:fld id="{F9557091-BBDF-4EB9-BA6B-2BB67AC4FC0F}" type="datetime1">
+            <a:fld id="{943C87E4-025C-4A83-855B-A4FD1A468031}" type="datetime1">
               <a:rPr lang="en-US" smtClean="0"/>
-              <a:t>10/3/2024</a:t>
+              <a:t>10/4/2024</a:t>
             </a:fld>
             <a:endParaRPr lang="en-US"/>
           </a:p>
@@ -3520,9 +3523,9 @@
           <a:bodyPr/>
           <a:lstStyle/>
           <a:p>
-            <a:fld id="{2D6B226B-77A6-410C-9796-083F278E0125}" type="datetime1">
+            <a:fld id="{2BF331B2-BA5B-4EAF-B1A6-7A0919522EFC}" type="datetime1">
               <a:rPr lang="en-US" smtClean="0"/>
-              <a:t>10/3/2024</a:t>
+              <a:t>10/4/2024</a:t>
             </a:fld>
             <a:endParaRPr lang="en-US"/>
           </a:p>
@@ -3633,9 +3636,9 @@
           <a:bodyPr/>
           <a:lstStyle/>
           <a:p>
-            <a:fld id="{A23A578B-D289-4C40-8593-3D356C49DA58}" type="datetime1">
+            <a:fld id="{FB77CCD0-06BD-4431-A028-E4F77FF8C962}" type="datetime1">
               <a:rPr lang="en-US" smtClean="0"/>
-              <a:t>10/3/2024</a:t>
+              <a:t>10/4/2024</a:t>
             </a:fld>
             <a:endParaRPr lang="en-US"/>
           </a:p>
@@ -3952,9 +3955,9 @@
           <a:bodyPr/>
           <a:lstStyle/>
           <a:p>
-            <a:fld id="{713DFAE3-14DB-48A7-A80F-80DDB072CE3D}" type="datetime1">
+            <a:fld id="{266BED47-8BC8-47AD-B942-EAC80F13F345}" type="datetime1">
               <a:rPr lang="en-US" smtClean="0"/>
-              <a:t>10/3/2024</a:t>
+              <a:t>10/4/2024</a:t>
             </a:fld>
             <a:endParaRPr lang="en-US"/>
           </a:p>
@@ -4246,9 +4249,9 @@
           <a:bodyPr/>
           <a:lstStyle/>
           <a:p>
-            <a:fld id="{92C5EAEF-6478-4102-8F5D-A5FE9FC97ACB}" type="datetime1">
+            <a:fld id="{2F1C4A48-D7ED-4CBB-9E79-28129440C4F6}" type="datetime1">
               <a:rPr lang="en-US" smtClean="0"/>
-              <a:t>10/3/2024</a:t>
+              <a:t>10/4/2024</a:t>
             </a:fld>
             <a:endParaRPr lang="en-US"/>
           </a:p>
@@ -4487,9 +4490,9 @@
             </a:lvl1pPr>
           </a:lstStyle>
           <a:p>
-            <a:fld id="{67F45AC6-C491-4585-A584-9CE2AF7D5500}" type="datetime1">
+            <a:fld id="{E7B12D50-7903-48BD-815F-92E9E6E82D2F}" type="datetime1">
               <a:rPr lang="en-US" smtClean="0"/>
-              <a:t>10/3/2024</a:t>
+              <a:t>10/4/2024</a:t>
             </a:fld>
             <a:endParaRPr lang="en-US"/>
           </a:p>
@@ -4602,7 +4605,7 @@
     <p:sldLayoutId id="2147483670" r:id="rId10"/>
     <p:sldLayoutId id="2147483671" r:id="rId11"/>
   </p:sldLayoutIdLst>
-  <p:hf sldNum="0" hdr="0" ftr="0" dt="0"/>
+  <p:hf hdr="0" ftr="0" dt="0"/>
   <p:txStyles>
     <p:titleStyle>
       <a:lvl1pPr algn="l" defTabSz="914400" rtl="0" eaLnBrk="1" latinLnBrk="0" hangingPunct="1">
@@ -5088,6 +5091,35 @@
           </a:p>
         </p:txBody>
       </p:sp>
+      <p:sp>
+        <p:nvSpPr>
+          <p:cNvPr id="5" name="Slide Number Placeholder 4">
+            <a:extLst>
+              <a:ext uri="{FF2B5EF4-FFF2-40B4-BE49-F238E27FC236}">
+                <a16:creationId xmlns:a16="http://schemas.microsoft.com/office/drawing/2014/main" id="{655FE372-734B-211A-5A50-955CF8D6D250}"/>
+              </a:ext>
+            </a:extLst>
+          </p:cNvPr>
+          <p:cNvSpPr>
+            <a:spLocks noGrp="1"/>
+          </p:cNvSpPr>
+          <p:nvPr>
+            <p:ph type="sldNum" sz="quarter" idx="12"/>
+          </p:nvPr>
+        </p:nvSpPr>
+        <p:spPr/>
+        <p:txBody>
+          <a:bodyPr/>
+          <a:lstStyle/>
+          <a:p>
+            <a:fld id="{CC057153-B650-4DEB-B370-79DDCFDCE934}" type="slidenum">
+              <a:rPr lang="en-US" smtClean="0"/>
+              <a:t>1</a:t>
+            </a:fld>
+            <a:endParaRPr lang="en-US"/>
+          </a:p>
+        </p:txBody>
+      </p:sp>
     </p:spTree>
     <p:extLst>
       <p:ext uri="{BB962C8B-B14F-4D97-AF65-F5344CB8AC3E}">
@@ -5574,6 +5606,35 @@
           </a:p>
         </p:txBody>
       </p:sp>
+      <p:sp>
+        <p:nvSpPr>
+          <p:cNvPr id="3" name="Slide Number Placeholder 2">
+            <a:extLst>
+              <a:ext uri="{FF2B5EF4-FFF2-40B4-BE49-F238E27FC236}">
+                <a16:creationId xmlns:a16="http://schemas.microsoft.com/office/drawing/2014/main" id="{18DF9BB5-82DB-B940-5F4F-48CB2741ABE4}"/>
+              </a:ext>
+            </a:extLst>
+          </p:cNvPr>
+          <p:cNvSpPr>
+            <a:spLocks noGrp="1"/>
+          </p:cNvSpPr>
+          <p:nvPr>
+            <p:ph type="sldNum" sz="quarter" idx="12"/>
+          </p:nvPr>
+        </p:nvSpPr>
+        <p:spPr/>
+        <p:txBody>
+          <a:bodyPr/>
+          <a:lstStyle/>
+          <a:p>
+            <a:fld id="{CC057153-B650-4DEB-B370-79DDCFDCE934}" type="slidenum">
+              <a:rPr lang="en-US" smtClean="0"/>
+              <a:t>10</a:t>
+            </a:fld>
+            <a:endParaRPr lang="en-US"/>
+          </a:p>
+        </p:txBody>
+      </p:sp>
     </p:spTree>
     <p:extLst>
       <p:ext uri="{BB962C8B-B14F-4D97-AF65-F5344CB8AC3E}">
@@ -5959,6 +6020,35 @@
           </a:p>
         </p:txBody>
       </p:sp>
+      <p:sp>
+        <p:nvSpPr>
+          <p:cNvPr id="3" name="Slide Number Placeholder 2">
+            <a:extLst>
+              <a:ext uri="{FF2B5EF4-FFF2-40B4-BE49-F238E27FC236}">
+                <a16:creationId xmlns:a16="http://schemas.microsoft.com/office/drawing/2014/main" id="{FF9CF3B7-07DE-84BF-CEED-2337ABED744B}"/>
+              </a:ext>
+            </a:extLst>
+          </p:cNvPr>
+          <p:cNvSpPr>
+            <a:spLocks noGrp="1"/>
+          </p:cNvSpPr>
+          <p:nvPr>
+            <p:ph type="sldNum" sz="quarter" idx="12"/>
+          </p:nvPr>
+        </p:nvSpPr>
+        <p:spPr/>
+        <p:txBody>
+          <a:bodyPr/>
+          <a:lstStyle/>
+          <a:p>
+            <a:fld id="{CC057153-B650-4DEB-B370-79DDCFDCE934}" type="slidenum">
+              <a:rPr lang="en-US" smtClean="0"/>
+              <a:t>11</a:t>
+            </a:fld>
+            <a:endParaRPr lang="en-US"/>
+          </a:p>
+        </p:txBody>
+      </p:sp>
     </p:spTree>
     <p:extLst>
       <p:ext uri="{BB962C8B-B14F-4D97-AF65-F5344CB8AC3E}">
@@ -6323,6 +6413,35 @@
           </a:p>
         </p:txBody>
       </p:sp>
+      <p:sp>
+        <p:nvSpPr>
+          <p:cNvPr id="3" name="Slide Number Placeholder 2">
+            <a:extLst>
+              <a:ext uri="{FF2B5EF4-FFF2-40B4-BE49-F238E27FC236}">
+                <a16:creationId xmlns:a16="http://schemas.microsoft.com/office/drawing/2014/main" id="{A5F27455-8E00-B646-49D5-2FB99A63D6E8}"/>
+              </a:ext>
+            </a:extLst>
+          </p:cNvPr>
+          <p:cNvSpPr>
+            <a:spLocks noGrp="1"/>
+          </p:cNvSpPr>
+          <p:nvPr>
+            <p:ph type="sldNum" sz="quarter" idx="12"/>
+          </p:nvPr>
+        </p:nvSpPr>
+        <p:spPr/>
+        <p:txBody>
+          <a:bodyPr/>
+          <a:lstStyle/>
+          <a:p>
+            <a:fld id="{CC057153-B650-4DEB-B370-79DDCFDCE934}" type="slidenum">
+              <a:rPr lang="en-US" smtClean="0"/>
+              <a:t>12</a:t>
+            </a:fld>
+            <a:endParaRPr lang="en-US"/>
+          </a:p>
+        </p:txBody>
+      </p:sp>
     </p:spTree>
     <p:extLst>
       <p:ext uri="{BB962C8B-B14F-4D97-AF65-F5344CB8AC3E}">
@@ -6641,6 +6760,35 @@
           </a:p>
         </p:txBody>
       </p:sp>
+      <p:sp>
+        <p:nvSpPr>
+          <p:cNvPr id="4" name="Slide Number Placeholder 3">
+            <a:extLst>
+              <a:ext uri="{FF2B5EF4-FFF2-40B4-BE49-F238E27FC236}">
+                <a16:creationId xmlns:a16="http://schemas.microsoft.com/office/drawing/2014/main" id="{EC082BFA-4138-EB32-5232-6F82C4032453}"/>
+              </a:ext>
+            </a:extLst>
+          </p:cNvPr>
+          <p:cNvSpPr>
+            <a:spLocks noGrp="1"/>
+          </p:cNvSpPr>
+          <p:nvPr>
+            <p:ph type="sldNum" sz="quarter" idx="12"/>
+          </p:nvPr>
+        </p:nvSpPr>
+        <p:spPr/>
+        <p:txBody>
+          <a:bodyPr/>
+          <a:lstStyle/>
+          <a:p>
+            <a:fld id="{CC057153-B650-4DEB-B370-79DDCFDCE934}" type="slidenum">
+              <a:rPr lang="en-US" smtClean="0"/>
+              <a:t>13</a:t>
+            </a:fld>
+            <a:endParaRPr lang="en-US"/>
+          </a:p>
+        </p:txBody>
+      </p:sp>
     </p:spTree>
     <p:extLst>
       <p:ext uri="{BB962C8B-B14F-4D97-AF65-F5344CB8AC3E}">
@@ -6964,6 +7112,35 @@
           </a:p>
         </p:txBody>
       </p:sp>
+      <p:sp>
+        <p:nvSpPr>
+          <p:cNvPr id="3" name="Slide Number Placeholder 2">
+            <a:extLst>
+              <a:ext uri="{FF2B5EF4-FFF2-40B4-BE49-F238E27FC236}">
+                <a16:creationId xmlns:a16="http://schemas.microsoft.com/office/drawing/2014/main" id="{A0D27E9D-9947-1A0B-55A4-155E916FBE41}"/>
+              </a:ext>
+            </a:extLst>
+          </p:cNvPr>
+          <p:cNvSpPr>
+            <a:spLocks noGrp="1"/>
+          </p:cNvSpPr>
+          <p:nvPr>
+            <p:ph type="sldNum" sz="quarter" idx="12"/>
+          </p:nvPr>
+        </p:nvSpPr>
+        <p:spPr/>
+        <p:txBody>
+          <a:bodyPr/>
+          <a:lstStyle/>
+          <a:p>
+            <a:fld id="{CC057153-B650-4DEB-B370-79DDCFDCE934}" type="slidenum">
+              <a:rPr lang="en-US" smtClean="0"/>
+              <a:t>2</a:t>
+            </a:fld>
+            <a:endParaRPr lang="en-US"/>
+          </a:p>
+        </p:txBody>
+      </p:sp>
     </p:spTree>
     <p:extLst>
       <p:ext uri="{BB962C8B-B14F-4D97-AF65-F5344CB8AC3E}">
@@ -7224,6 +7401,35 @@
           </a:p>
         </p:txBody>
       </p:sp>
+      <p:sp>
+        <p:nvSpPr>
+          <p:cNvPr id="3" name="Slide Number Placeholder 2">
+            <a:extLst>
+              <a:ext uri="{FF2B5EF4-FFF2-40B4-BE49-F238E27FC236}">
+                <a16:creationId xmlns:a16="http://schemas.microsoft.com/office/drawing/2014/main" id="{2D2365E2-BE2F-814B-3ABF-6F29A35E07E0}"/>
+              </a:ext>
+            </a:extLst>
+          </p:cNvPr>
+          <p:cNvSpPr>
+            <a:spLocks noGrp="1"/>
+          </p:cNvSpPr>
+          <p:nvPr>
+            <p:ph type="sldNum" sz="quarter" idx="12"/>
+          </p:nvPr>
+        </p:nvSpPr>
+        <p:spPr/>
+        <p:txBody>
+          <a:bodyPr/>
+          <a:lstStyle/>
+          <a:p>
+            <a:fld id="{CC057153-B650-4DEB-B370-79DDCFDCE934}" type="slidenum">
+              <a:rPr lang="en-US" smtClean="0"/>
+              <a:t>3</a:t>
+            </a:fld>
+            <a:endParaRPr lang="en-US"/>
+          </a:p>
+        </p:txBody>
+      </p:sp>
     </p:spTree>
     <p:extLst>
       <p:ext uri="{BB962C8B-B14F-4D97-AF65-F5344CB8AC3E}">
@@ -7593,6 +7799,35 @@
           </a:p>
         </p:txBody>
       </p:sp>
+      <p:sp>
+        <p:nvSpPr>
+          <p:cNvPr id="3" name="Slide Number Placeholder 2">
+            <a:extLst>
+              <a:ext uri="{FF2B5EF4-FFF2-40B4-BE49-F238E27FC236}">
+                <a16:creationId xmlns:a16="http://schemas.microsoft.com/office/drawing/2014/main" id="{751C1D1A-21A3-F881-750E-94B2AC0F2005}"/>
+              </a:ext>
+            </a:extLst>
+          </p:cNvPr>
+          <p:cNvSpPr>
+            <a:spLocks noGrp="1"/>
+          </p:cNvSpPr>
+          <p:nvPr>
+            <p:ph type="sldNum" sz="quarter" idx="12"/>
+          </p:nvPr>
+        </p:nvSpPr>
+        <p:spPr/>
+        <p:txBody>
+          <a:bodyPr/>
+          <a:lstStyle/>
+          <a:p>
+            <a:fld id="{CC057153-B650-4DEB-B370-79DDCFDCE934}" type="slidenum">
+              <a:rPr lang="en-US" smtClean="0"/>
+              <a:t>4</a:t>
+            </a:fld>
+            <a:endParaRPr lang="en-US"/>
+          </a:p>
+        </p:txBody>
+      </p:sp>
     </p:spTree>
     <p:extLst>
       <p:ext uri="{BB962C8B-B14F-4D97-AF65-F5344CB8AC3E}">
@@ -7978,6 +8213,35 @@
           </a:p>
         </p:txBody>
       </p:sp>
+      <p:sp>
+        <p:nvSpPr>
+          <p:cNvPr id="3" name="Slide Number Placeholder 2">
+            <a:extLst>
+              <a:ext uri="{FF2B5EF4-FFF2-40B4-BE49-F238E27FC236}">
+                <a16:creationId xmlns:a16="http://schemas.microsoft.com/office/drawing/2014/main" id="{24407017-E16D-4F51-5909-B27FF4FD330E}"/>
+              </a:ext>
+            </a:extLst>
+          </p:cNvPr>
+          <p:cNvSpPr>
+            <a:spLocks noGrp="1"/>
+          </p:cNvSpPr>
+          <p:nvPr>
+            <p:ph type="sldNum" sz="quarter" idx="12"/>
+          </p:nvPr>
+        </p:nvSpPr>
+        <p:spPr/>
+        <p:txBody>
+          <a:bodyPr/>
+          <a:lstStyle/>
+          <a:p>
+            <a:fld id="{CC057153-B650-4DEB-B370-79DDCFDCE934}" type="slidenum">
+              <a:rPr lang="en-US" smtClean="0"/>
+              <a:t>5</a:t>
+            </a:fld>
+            <a:endParaRPr lang="en-US"/>
+          </a:p>
+        </p:txBody>
+      </p:sp>
     </p:spTree>
     <p:extLst>
       <p:ext uri="{BB962C8B-B14F-4D97-AF65-F5344CB8AC3E}">
@@ -8363,6 +8627,35 @@
           </a:p>
         </p:txBody>
       </p:sp>
+      <p:sp>
+        <p:nvSpPr>
+          <p:cNvPr id="3" name="Slide Number Placeholder 2">
+            <a:extLst>
+              <a:ext uri="{FF2B5EF4-FFF2-40B4-BE49-F238E27FC236}">
+                <a16:creationId xmlns:a16="http://schemas.microsoft.com/office/drawing/2014/main" id="{62B92A83-9470-F583-6D75-FC70B5215ACB}"/>
+              </a:ext>
+            </a:extLst>
+          </p:cNvPr>
+          <p:cNvSpPr>
+            <a:spLocks noGrp="1"/>
+          </p:cNvSpPr>
+          <p:nvPr>
+            <p:ph type="sldNum" sz="quarter" idx="12"/>
+          </p:nvPr>
+        </p:nvSpPr>
+        <p:spPr/>
+        <p:txBody>
+          <a:bodyPr/>
+          <a:lstStyle/>
+          <a:p>
+            <a:fld id="{CC057153-B650-4DEB-B370-79DDCFDCE934}" type="slidenum">
+              <a:rPr lang="en-US" smtClean="0"/>
+              <a:t>6</a:t>
+            </a:fld>
+            <a:endParaRPr lang="en-US"/>
+          </a:p>
+        </p:txBody>
+      </p:sp>
     </p:spTree>
     <p:extLst>
       <p:ext uri="{BB962C8B-B14F-4D97-AF65-F5344CB8AC3E}">
@@ -8748,6 +9041,35 @@
           </a:p>
         </p:txBody>
       </p:sp>
+      <p:sp>
+        <p:nvSpPr>
+          <p:cNvPr id="3" name="Slide Number Placeholder 2">
+            <a:extLst>
+              <a:ext uri="{FF2B5EF4-FFF2-40B4-BE49-F238E27FC236}">
+                <a16:creationId xmlns:a16="http://schemas.microsoft.com/office/drawing/2014/main" id="{DBC2038A-82E2-2D46-847E-EC537BD5CA04}"/>
+              </a:ext>
+            </a:extLst>
+          </p:cNvPr>
+          <p:cNvSpPr>
+            <a:spLocks noGrp="1"/>
+          </p:cNvSpPr>
+          <p:nvPr>
+            <p:ph type="sldNum" sz="quarter" idx="12"/>
+          </p:nvPr>
+        </p:nvSpPr>
+        <p:spPr/>
+        <p:txBody>
+          <a:bodyPr/>
+          <a:lstStyle/>
+          <a:p>
+            <a:fld id="{CC057153-B650-4DEB-B370-79DDCFDCE934}" type="slidenum">
+              <a:rPr lang="en-US" smtClean="0"/>
+              <a:t>7</a:t>
+            </a:fld>
+            <a:endParaRPr lang="en-US"/>
+          </a:p>
+        </p:txBody>
+      </p:sp>
     </p:spTree>
     <p:extLst>
       <p:ext uri="{BB962C8B-B14F-4D97-AF65-F5344CB8AC3E}">
@@ -9008,6 +9330,35 @@
           </a:p>
         </p:txBody>
       </p:sp>
+      <p:sp>
+        <p:nvSpPr>
+          <p:cNvPr id="3" name="Slide Number Placeholder 2">
+            <a:extLst>
+              <a:ext uri="{FF2B5EF4-FFF2-40B4-BE49-F238E27FC236}">
+                <a16:creationId xmlns:a16="http://schemas.microsoft.com/office/drawing/2014/main" id="{145288A0-DE5F-8F1E-985D-6AA9898CC040}"/>
+              </a:ext>
+            </a:extLst>
+          </p:cNvPr>
+          <p:cNvSpPr>
+            <a:spLocks noGrp="1"/>
+          </p:cNvSpPr>
+          <p:nvPr>
+            <p:ph type="sldNum" sz="quarter" idx="12"/>
+          </p:nvPr>
+        </p:nvSpPr>
+        <p:spPr/>
+        <p:txBody>
+          <a:bodyPr/>
+          <a:lstStyle/>
+          <a:p>
+            <a:fld id="{CC057153-B650-4DEB-B370-79DDCFDCE934}" type="slidenum">
+              <a:rPr lang="en-US" smtClean="0"/>
+              <a:t>8</a:t>
+            </a:fld>
+            <a:endParaRPr lang="en-US"/>
+          </a:p>
+        </p:txBody>
+      </p:sp>
     </p:spTree>
     <p:extLst>
       <p:ext uri="{BB962C8B-B14F-4D97-AF65-F5344CB8AC3E}">
@@ -9390,6 +9741,35 @@
               <a:t>XML (Extensible Markup Language) is a data format that is similar to HTML and is used for storing and transferring data. It supports nested data structures and is widely used in enterprise applications.</a:t>
             </a:r>
             <a:endParaRPr lang="en-IN" sz="1400"/>
+          </a:p>
+        </p:txBody>
+      </p:sp>
+      <p:sp>
+        <p:nvSpPr>
+          <p:cNvPr id="3" name="Slide Number Placeholder 2">
+            <a:extLst>
+              <a:ext uri="{FF2B5EF4-FFF2-40B4-BE49-F238E27FC236}">
+                <a16:creationId xmlns:a16="http://schemas.microsoft.com/office/drawing/2014/main" id="{62AAF954-3FBA-6DE9-ABF7-50CEECD88707}"/>
+              </a:ext>
+            </a:extLst>
+          </p:cNvPr>
+          <p:cNvSpPr>
+            <a:spLocks noGrp="1"/>
+          </p:cNvSpPr>
+          <p:nvPr>
+            <p:ph type="sldNum" sz="quarter" idx="12"/>
+          </p:nvPr>
+        </p:nvSpPr>
+        <p:spPr/>
+        <p:txBody>
+          <a:bodyPr/>
+          <a:lstStyle/>
+          <a:p>
+            <a:fld id="{CC057153-B650-4DEB-B370-79DDCFDCE934}" type="slidenum">
+              <a:rPr lang="en-US" smtClean="0"/>
+              <a:t>9</a:t>
+            </a:fld>
+            <a:endParaRPr lang="en-US"/>
           </a:p>
         </p:txBody>
       </p:sp>
